--- a/out/analysis/dnssec_algorithm_flows.pptx
+++ b/out/analysis/dnssec_algorithm_flows.pptx
@@ -12,6 +12,8 @@
     <p:sldId id="260" r:id="rId11"/>
     <p:sldId id="261" r:id="rId12"/>
     <p:sldId id="262" r:id="rId13"/>
+    <p:sldId id="263" r:id="rId14"/>
+    <p:sldId id="264" r:id="rId15"/>
   </p:sldIdLst>
   <p:sldSz cx="12191695" cy="6858000" type="screen4x3"/>
   <p:notesSz cx="6858000" cy="9144000"/>
@@ -4349,6 +4351,418 @@
 </file>
 
 <file path=ppt/slides/slide7.xml><?xml version="1.0" encoding="utf-8"?>
+<p:sld xmlns:a="http://schemas.openxmlformats.org/drawingml/2006/main" xmlns:p="http://schemas.openxmlformats.org/presentationml/2006/main" xmlns:r="http://schemas.openxmlformats.org/officeDocument/2006/relationships">
+  <p:cSld>
+    <p:bg>
+      <p:bgPr>
+        <a:solidFill>
+          <a:srgbClr val="FCFCFB"/>
+        </a:solidFill>
+        <a:effectLst/>
+      </p:bgPr>
+    </p:bg>
+    <p:spTree>
+      <p:nvGrpSpPr>
+        <p:cNvPr id="1" name=""/>
+        <p:cNvGrpSpPr/>
+        <p:nvPr/>
+      </p:nvGrpSpPr>
+      <p:grpSpPr/>
+      <p:sp>
+        <p:nvSpPr>
+          <p:cNvPr id="2" name="TextBox 1"/>
+          <p:cNvSpPr txBox="1"/>
+          <p:nvPr/>
+        </p:nvSpPr>
+        <p:spPr>
+          <a:xfrm>
+            <a:off x="566928" y="347472"/>
+            <a:ext cx="10972800" cy="274320"/>
+          </a:xfrm>
+          <a:prstGeom prst="rect">
+            <a:avLst/>
+          </a:prstGeom>
+          <a:noFill/>
+        </p:spPr>
+        <p:txBody>
+          <a:bodyPr wrap="square">
+            <a:spAutoFit/>
+          </a:bodyPr>
+          <a:lstStyle/>
+          <a:p>
+            <a:pPr>
+              <a:spcAft>
+                <a:spcPts val="600"/>
+              </a:spcAft>
+            </a:pPr>
+            <a:r>
+              <a:rPr sz="1200" b="1">
+                <a:solidFill>
+                  <a:srgbClr val="898781"/>
+                </a:solidFill>
+                <a:latin typeface="Segoe UI"/>
+              </a:rPr>
+              <a:t>OPENINTEL</a:t>
+            </a:r>
+          </a:p>
+        </p:txBody>
+      </p:sp>
+      <p:sp>
+        <p:nvSpPr>
+          <p:cNvPr id="3" name="TextBox 2"/>
+          <p:cNvSpPr txBox="1"/>
+          <p:nvPr/>
+        </p:nvSpPr>
+        <p:spPr>
+          <a:xfrm>
+            <a:off x="566928" y="621792"/>
+            <a:ext cx="11064240" cy="640080"/>
+          </a:xfrm>
+          <a:prstGeom prst="rect">
+            <a:avLst/>
+          </a:prstGeom>
+          <a:noFill/>
+        </p:spPr>
+        <p:txBody>
+          <a:bodyPr wrap="square">
+            <a:spAutoFit/>
+          </a:bodyPr>
+          <a:lstStyle/>
+          <a:p>
+            <a:pPr>
+              <a:spcAft>
+                <a:spcPts val="600"/>
+              </a:spcAft>
+            </a:pPr>
+            <a:r>
+              <a:rPr sz="2800" b="1">
+                <a:solidFill>
+                  <a:srgbClr val="0B0B0B"/>
+                </a:solidFill>
+                <a:latin typeface="Segoe UI"/>
+              </a:rPr>
+              <a:t>What the signed zones of each TLD actually run</a:t>
+            </a:r>
+          </a:p>
+        </p:txBody>
+      </p:sp>
+      <p:pic>
+        <p:nvPicPr>
+          <p:cNvPr id="4" name="Picture 3" descr="f6_forward_family_share.png"/>
+          <p:cNvPicPr>
+            <a:picLocks noChangeAspect="1"/>
+          </p:cNvPicPr>
+          <p:nvPr/>
+        </p:nvPicPr>
+        <p:blipFill>
+          <a:blip r:embed="rId2"/>
+          <a:stretch>
+            <a:fillRect/>
+          </a:stretch>
+        </p:blipFill>
+        <p:spPr>
+          <a:xfrm>
+            <a:off x="1787629" y="1444752"/>
+            <a:ext cx="8616436" cy="4133087"/>
+          </a:xfrm>
+          <a:prstGeom prst="rect">
+            <a:avLst/>
+          </a:prstGeom>
+        </p:spPr>
+      </p:pic>
+      <p:sp>
+        <p:nvSpPr>
+          <p:cNvPr id="5" name="TextBox 4"/>
+          <p:cNvSpPr txBox="1"/>
+          <p:nvPr/>
+        </p:nvSpPr>
+        <p:spPr>
+          <a:xfrm>
+            <a:off x="566928" y="5742432"/>
+            <a:ext cx="11064240" cy="411480"/>
+          </a:xfrm>
+          <a:prstGeom prst="rect">
+            <a:avLst/>
+          </a:prstGeom>
+          <a:noFill/>
+        </p:spPr>
+        <p:txBody>
+          <a:bodyPr wrap="square">
+            <a:spAutoFit/>
+          </a:bodyPr>
+          <a:lstStyle/>
+          <a:p>
+            <a:pPr>
+              <a:spcAft>
+                <a:spcPts val="600"/>
+              </a:spcAft>
+            </a:pPr>
+            <a:r>
+              <a:rPr sz="1600" b="1">
+                <a:solidFill>
+                  <a:srgbClr val="2A78D6"/>
+                </a:solidFill>
+                <a:latin typeface="Segoe UI"/>
+              </a:rPr>
+              <a:t>.ee is 96% ECDSA and .ch 91%, but .se is only 57% and .gov still 9% RSA/SHA-1.</a:t>
+            </a:r>
+          </a:p>
+        </p:txBody>
+      </p:sp>
+      <p:sp>
+        <p:nvSpPr>
+          <p:cNvPr id="6" name="TextBox 5"/>
+          <p:cNvSpPr txBox="1"/>
+          <p:nvPr/>
+        </p:nvSpPr>
+        <p:spPr>
+          <a:xfrm>
+            <a:off x="566928" y="6199632"/>
+            <a:ext cx="11064240" cy="457200"/>
+          </a:xfrm>
+          <a:prstGeom prst="rect">
+            <a:avLst/>
+          </a:prstGeom>
+          <a:noFill/>
+        </p:spPr>
+        <p:txBody>
+          <a:bodyPr wrap="square">
+            <a:spAutoFit/>
+          </a:bodyPr>
+          <a:lstStyle/>
+          <a:p>
+            <a:pPr>
+              <a:spcAft>
+                <a:spcPts val="600"/>
+              </a:spcAft>
+            </a:pPr>
+            <a:r>
+              <a:rPr sz="1100" b="0">
+                <a:solidFill>
+                  <a:srgbClr val="898781"/>
+                </a:solidFill>
+                <a:latin typeface="Segoe UI"/>
+              </a:rPr>
+              <a:t>Share of each TLD's signed zones by family. The forward corpus runs 2016-06 to 2023-12 and TLDs enter at different dates, so each panel starts where its data does.</a:t>
+            </a:r>
+          </a:p>
+        </p:txBody>
+      </p:sp>
+    </p:spTree>
+  </p:cSld>
+  <p:clrMapOvr>
+    <a:masterClrMapping/>
+  </p:clrMapOvr>
+</p:sld>
+</file>
+
+<file path=ppt/slides/slide8.xml><?xml version="1.0" encoding="utf-8"?>
+<p:sld xmlns:a="http://schemas.openxmlformats.org/drawingml/2006/main" xmlns:p="http://schemas.openxmlformats.org/presentationml/2006/main" xmlns:r="http://schemas.openxmlformats.org/officeDocument/2006/relationships">
+  <p:cSld>
+    <p:bg>
+      <p:bgPr>
+        <a:solidFill>
+          <a:srgbClr val="FCFCFB"/>
+        </a:solidFill>
+        <a:effectLst/>
+      </p:bgPr>
+    </p:bg>
+    <p:spTree>
+      <p:nvGrpSpPr>
+        <p:cNvPr id="1" name=""/>
+        <p:cNvGrpSpPr/>
+        <p:nvPr/>
+      </p:nvGrpSpPr>
+      <p:grpSpPr/>
+      <p:sp>
+        <p:nvSpPr>
+          <p:cNvPr id="2" name="TextBox 1"/>
+          <p:cNvSpPr txBox="1"/>
+          <p:nvPr/>
+        </p:nvSpPr>
+        <p:spPr>
+          <a:xfrm>
+            <a:off x="566928" y="347472"/>
+            <a:ext cx="10972800" cy="274320"/>
+          </a:xfrm>
+          <a:prstGeom prst="rect">
+            <a:avLst/>
+          </a:prstGeom>
+          <a:noFill/>
+        </p:spPr>
+        <p:txBody>
+          <a:bodyPr wrap="square">
+            <a:spAutoFit/>
+          </a:bodyPr>
+          <a:lstStyle/>
+          <a:p>
+            <a:pPr>
+              <a:spcAft>
+                <a:spcPts val="600"/>
+              </a:spcAft>
+            </a:pPr>
+            <a:r>
+              <a:rPr sz="1200" b="1">
+                <a:solidFill>
+                  <a:srgbClr val="898781"/>
+                </a:solidFill>
+                <a:latin typeface="Segoe UI"/>
+              </a:rPr>
+              <a:t>OPENINTEL</a:t>
+            </a:r>
+          </a:p>
+        </p:txBody>
+      </p:sp>
+      <p:sp>
+        <p:nvSpPr>
+          <p:cNvPr id="3" name="TextBox 2"/>
+          <p:cNvSpPr txBox="1"/>
+          <p:nvPr/>
+        </p:nvSpPr>
+        <p:spPr>
+          <a:xfrm>
+            <a:off x="566928" y="621792"/>
+            <a:ext cx="11064240" cy="640080"/>
+          </a:xfrm>
+          <a:prstGeom prst="rect">
+            <a:avLst/>
+          </a:prstGeom>
+          <a:noFill/>
+        </p:spPr>
+        <p:txBody>
+          <a:bodyPr wrap="square">
+            <a:spAutoFit/>
+          </a:bodyPr>
+          <a:lstStyle/>
+          <a:p>
+            <a:pPr>
+              <a:spcAft>
+                <a:spcPts val="600"/>
+              </a:spcAft>
+            </a:pPr>
+            <a:r>
+              <a:rPr sz="2800" b="1">
+                <a:solidFill>
+                  <a:srgbClr val="0B0B0B"/>
+                </a:solidFill>
+                <a:latin typeface="Segoe UI"/>
+              </a:rPr>
+              <a:t>The migration, and the rollovers still in flight</a:t>
+            </a:r>
+          </a:p>
+        </p:txBody>
+      </p:sp>
+      <p:pic>
+        <p:nvPicPr>
+          <p:cNvPr id="4" name="Picture 3" descr="f7_forward_net_growth.png"/>
+          <p:cNvPicPr>
+            <a:picLocks noChangeAspect="1"/>
+          </p:cNvPicPr>
+          <p:nvPr/>
+        </p:nvPicPr>
+        <p:blipFill>
+          <a:blip r:embed="rId2"/>
+          <a:stretch>
+            <a:fillRect/>
+          </a:stretch>
+        </p:blipFill>
+        <p:spPr>
+          <a:xfrm>
+            <a:off x="1151632" y="1444752"/>
+            <a:ext cx="9888431" cy="4133087"/>
+          </a:xfrm>
+          <a:prstGeom prst="rect">
+            <a:avLst/>
+          </a:prstGeom>
+        </p:spPr>
+      </p:pic>
+      <p:sp>
+        <p:nvSpPr>
+          <p:cNvPr id="5" name="TextBox 4"/>
+          <p:cNvSpPr txBox="1"/>
+          <p:nvPr/>
+        </p:nvSpPr>
+        <p:spPr>
+          <a:xfrm>
+            <a:off x="566928" y="5742432"/>
+            <a:ext cx="11064240" cy="411480"/>
+          </a:xfrm>
+          <a:prstGeom prst="rect">
+            <a:avLst/>
+          </a:prstGeom>
+          <a:noFill/>
+        </p:spPr>
+        <p:txBody>
+          <a:bodyPr wrap="square">
+            <a:spAutoFit/>
+          </a:bodyPr>
+          <a:lstStyle/>
+          <a:p>
+            <a:pPr>
+              <a:spcAft>
+                <a:spcPts val="600"/>
+              </a:spcAft>
+            </a:pPr>
+            <a:r>
+              <a:rPr sz="1600" b="1">
+                <a:solidFill>
+                  <a:srgbClr val="2A78D6"/>
+                </a:solidFill>
+                <a:latin typeface="Segoe UI"/>
+              </a:rPr>
+              <a:t>219,967 zones were publishing two algorithm families at once in 2019-11.</a:t>
+            </a:r>
+          </a:p>
+        </p:txBody>
+      </p:sp>
+      <p:sp>
+        <p:nvSpPr>
+          <p:cNvPr id="6" name="TextBox 5"/>
+          <p:cNvSpPr txBox="1"/>
+          <p:nvPr/>
+        </p:nvSpPr>
+        <p:spPr>
+          <a:xfrm>
+            <a:off x="566928" y="6199632"/>
+            <a:ext cx="11064240" cy="457200"/>
+          </a:xfrm>
+          <a:prstGeom prst="rect">
+            <a:avLst/>
+          </a:prstGeom>
+          <a:noFill/>
+        </p:spPr>
+        <p:txBody>
+          <a:bodyPr wrap="square">
+            <a:spAutoFit/>
+          </a:bodyPr>
+          <a:lstStyle/>
+          <a:p>
+            <a:pPr>
+              <a:spcAft>
+                <a:spcPts val="600"/>
+              </a:spcAft>
+            </a:pPr>
+            <a:r>
+              <a:rPr sz="1100" b="0">
+                <a:solidFill>
+                  <a:srgbClr val="898781"/>
+                </a:solidFill>
+                <a:latin typeface="Segoe UI"/>
+              </a:rPr>
+              <a:t>Lines sum to more than the total because a zone rolling over publishes both algorithms; that gap is the population mid-rollover. Per-algorithm counts overlap and must never be stacked.</a:t>
+            </a:r>
+          </a:p>
+        </p:txBody>
+      </p:sp>
+    </p:spTree>
+  </p:cSld>
+  <p:clrMapOvr>
+    <a:masterClrMapping/>
+  </p:clrMapOvr>
+</p:sld>
+</file>
+
+<file path=ppt/slides/slide9.xml><?xml version="1.0" encoding="utf-8"?>
 <p:sld xmlns:a="http://schemas.openxmlformats.org/drawingml/2006/main" xmlns:p="http://schemas.openxmlformats.org/presentationml/2006/main" xmlns:r="http://schemas.openxmlformats.org/officeDocument/2006/relationships">
   <p:cSld>
     <p:bg>

--- a/out/analysis/dnssec_algorithm_flows.pptx
+++ b/out/analysis/dnssec_algorithm_flows.pptx
@@ -3432,8 +3432,8 @@
         </p:blipFill>
         <p:spPr>
           <a:xfrm>
-            <a:off x="1609840" y="1444752"/>
-            <a:ext cx="8972014" cy="4133087"/>
+            <a:off x="1668101" y="1444752"/>
+            <a:ext cx="8855492" cy="4133087"/>
           </a:xfrm>
           <a:prstGeom prst="rect">
             <a:avLst/>
@@ -3638,8 +3638,8 @@
         </p:blipFill>
         <p:spPr>
           <a:xfrm>
-            <a:off x="1304466" y="1444752"/>
-            <a:ext cx="9582762" cy="4133087"/>
+            <a:off x="1488340" y="1444752"/>
+            <a:ext cx="9215015" cy="4133087"/>
           </a:xfrm>
           <a:prstGeom prst="rect">
             <a:avLst/>
